--- a/public/plans/2026-06-08.pptx
+++ b/public/plans/2026-06-08.pptx
@@ -9972,7 +9972,7 @@
                 </a:solidFill>
                 <a:latin typeface="Calibri"/>
               </a:rPr>
-              <a:t>Ages 3–5  ·  45 minute session</a:t>
+              <a:t>Ages 3–5 · 45 minute session</a:t>
             </a:r>
           </a:p>
         </p:txBody>
@@ -10189,7 +10189,7 @@
                 </a:solidFill>
                 <a:latin typeface="Calibri"/>
               </a:rPr>
-              <a:t>COACH PLAYBOOK · PRE-K &amp; K</a:t>
+              <a:t>COACH PLAYBOOK · PRE-K &amp; KINDERGARTEN</a:t>
             </a:r>
           </a:p>
         </p:txBody>
@@ -13044,7 +13044,7 @@
                 </a:solidFill>
                 <a:latin typeface="Calibri"/>
               </a:rPr>
-              <a:t>qmtk Soccer · Coach Playbook · Pre-K &amp; K</a:t>
+              <a:t>qmtk Soccer · Coach Playbook · Pre-K &amp; Kindergarten</a:t>
             </a:r>
           </a:p>
         </p:txBody>
@@ -13261,7 +13261,7 @@
                 </a:solidFill>
                 <a:latin typeface="Calibri"/>
               </a:rPr>
-              <a:t>COACH PLAYBOOK · PRE-K &amp; K</a:t>
+              <a:t>COACH PLAYBOOK · PRE-K &amp; KINDERGARTEN</a:t>
             </a:r>
           </a:p>
         </p:txBody>
@@ -16116,7 +16116,7 @@
                 </a:solidFill>
                 <a:latin typeface="Calibri"/>
               </a:rPr>
-              <a:t>qmtk Soccer · Coach Playbook · Pre-K &amp; K</a:t>
+              <a:t>qmtk Soccer · Coach Playbook · Pre-K &amp; Kindergarten</a:t>
             </a:r>
           </a:p>
         </p:txBody>
@@ -16333,7 +16333,7 @@
                 </a:solidFill>
                 <a:latin typeface="Calibri"/>
               </a:rPr>
-              <a:t>COACH PLAYBOOK · PRE-K &amp; K</a:t>
+              <a:t>COACH PLAYBOOK · PRE-K &amp; KINDERGARTEN</a:t>
             </a:r>
           </a:p>
         </p:txBody>
@@ -19188,7 +19188,7 @@
                 </a:solidFill>
                 <a:latin typeface="Calibri"/>
               </a:rPr>
-              <a:t>qmtk Soccer · Coach Playbook · Pre-K &amp; K</a:t>
+              <a:t>qmtk Soccer · Coach Playbook · Pre-K &amp; Kindergarten</a:t>
             </a:r>
           </a:p>
         </p:txBody>
@@ -19405,7 +19405,7 @@
                 </a:solidFill>
                 <a:latin typeface="Calibri"/>
               </a:rPr>
-              <a:t>COACH PLAYBOOK · PRE-K &amp; K</a:t>
+              <a:t>COACH PLAYBOOK · PRE-K &amp; KINDERGARTEN</a:t>
             </a:r>
           </a:p>
         </p:txBody>
@@ -21800,7 +21800,7 @@
                 </a:solidFill>
                 <a:latin typeface="Calibri"/>
               </a:rPr>
-              <a:t>qmtk Soccer · Coach Playbook · Pre-K &amp; K</a:t>
+              <a:t>qmtk Soccer · Coach Playbook · Pre-K &amp; Kindergarten</a:t>
             </a:r>
           </a:p>
         </p:txBody>
@@ -22130,7 +22130,7 @@
                 </a:solidFill>
                 <a:latin typeface="Calibri"/>
               </a:rPr>
-              <a:t>Ages 6–11  ·  60 minute session</a:t>
+              <a:t>Ages 6–11 · 60 minute session</a:t>
             </a:r>
           </a:p>
         </p:txBody>
